--- a/paidagogiko/ΠΡΥ 060 - Διδακτική Πληροφορικής ΙΙ/assgnment-23-09-2026/example.pptx
+++ b/paidagogiko/ΠΡΥ 060 - Διδακτική Πληροφορικής ΙΙ/assgnment-23-09-2026/example.pptx
@@ -5,8 +5,7 @@
     <p:sldMasterId id="2147483648" r:id="rId1"/>
   </p:sldMasterIdLst>
   <p:sldIdLst>
-    <p:sldId id="256" r:id="rId2"/>
-    <p:sldId id="257" r:id="rId3"/>
+    <p:sldId id="257" r:id="rId2"/>
   </p:sldIdLst>
   <p:sldSz cx="12192000" cy="6858000"/>
   <p:notesSz cx="6858000" cy="9144000"/>
@@ -113,37 +112,28 @@
 </p:presentation>
 </file>
 
-<file path=ppt/revisionInfo.xml><?xml version="1.0" encoding="utf-8"?>
-<p1510:revInfo xmlns:a="http://schemas.openxmlformats.org/drawingml/2006/main" xmlns:r="http://schemas.openxmlformats.org/officeDocument/2006/relationships" xmlns:p1510="http://schemas.microsoft.com/office/powerpoint/2015/10/main">
-  <p1510:revLst>
-    <p1510:client id="{CF0D0E6B-FD82-477B-B656-B64205965F2F}" v="1" dt="2026-09-28T06:44:26.334"/>
-  </p1510:revLst>
-</p1510:revInfo>
-</file>
-
 <file path=ppt/changesInfos/changesInfo1.xml><?xml version="1.0" encoding="utf-8"?>
 <pc:chgInfo xmlns:a="http://schemas.openxmlformats.org/drawingml/2006/main" xmlns:r="http://schemas.openxmlformats.org/officeDocument/2006/relationships" xmlns:ac="http://schemas.microsoft.com/office/drawing/2013/main/command" xmlns:pc="http://schemas.microsoft.com/office/powerpoint/2013/main/command">
   <pc:docChgLst>
     <pc:chgData name="Άριστος Αρέστη" userId="813aa191-2d4c-464f-9d05-0a7e494d859f" providerId="ADAL" clId="{49C7B61D-1ACF-4AFF-A04E-A3B433E32474}"/>
-    <pc:docChg chg="addSld modSld">
-      <pc:chgData name="Άριστος Αρέστη" userId="813aa191-2d4c-464f-9d05-0a7e494d859f" providerId="ADAL" clId="{49C7B61D-1ACF-4AFF-A04E-A3B433E32474}" dt="2026-09-28T06:45:24.463" v="6" actId="27918"/>
+    <pc:docChg chg="addSld delSld modSld">
+      <pc:chgData name="Άριστος Αρέστη" userId="813aa191-2d4c-464f-9d05-0a7e494d859f" providerId="ADAL" clId="{49C7B61D-1ACF-4AFF-A04E-A3B433E32474}" dt="2026-10-01T07:44:22.930" v="9" actId="47"/>
       <pc:docMkLst>
         <pc:docMk/>
       </pc:docMkLst>
+      <pc:sldChg chg="del mod">
+        <pc:chgData name="Άριστος Αρέστη" userId="813aa191-2d4c-464f-9d05-0a7e494d859f" providerId="ADAL" clId="{49C7B61D-1ACF-4AFF-A04E-A3B433E32474}" dt="2026-10-01T07:44:22.930" v="9" actId="47"/>
+        <pc:sldMkLst>
+          <pc:docMk/>
+          <pc:sldMk cId="3399422133" sldId="256"/>
+        </pc:sldMkLst>
+      </pc:sldChg>
       <pc:sldChg chg="addSp delSp modSp new mod">
         <pc:chgData name="Άριστος Αρέστη" userId="813aa191-2d4c-464f-9d05-0a7e494d859f" providerId="ADAL" clId="{49C7B61D-1ACF-4AFF-A04E-A3B433E32474}" dt="2026-09-28T06:45:24.463" v="6" actId="27918"/>
         <pc:sldMkLst>
           <pc:docMk/>
           <pc:sldMk cId="970086489" sldId="257"/>
         </pc:sldMkLst>
-        <pc:spChg chg="del">
-          <ac:chgData name="Άριστος Αρέστη" userId="813aa191-2d4c-464f-9d05-0a7e494d859f" providerId="ADAL" clId="{49C7B61D-1ACF-4AFF-A04E-A3B433E32474}" dt="2026-09-28T06:44:26.334" v="2" actId="1957"/>
-          <ac:spMkLst>
-            <pc:docMk/>
-            <pc:sldMk cId="970086489" sldId="257"/>
-            <ac:spMk id="3" creationId="{45604D31-1663-FF87-FD13-60DEA67B343C}"/>
-          </ac:spMkLst>
-        </pc:spChg>
         <pc:graphicFrameChg chg="add mod">
           <ac:chgData name="Άριστος Αρέστη" userId="813aa191-2d4c-464f-9d05-0a7e494d859f" providerId="ADAL" clId="{49C7B61D-1ACF-4AFF-A04E-A3B433E32474}" dt="2026-09-28T06:44:26.334" v="2" actId="1957"/>
           <ac:graphicFrameMkLst>
@@ -159,346 +149,6 @@
 </file>
 
 <file path=ppt/charts/chart1.xml><?xml version="1.0" encoding="utf-8"?>
-<c:chartSpace xmlns:c="http://schemas.openxmlformats.org/drawingml/2006/chart" xmlns:a="http://schemas.openxmlformats.org/drawingml/2006/main" xmlns:r="http://schemas.openxmlformats.org/officeDocument/2006/relationships" xmlns:c16r2="http://schemas.microsoft.com/office/drawing/2015/06/chart">
-  <c:date1904 val="0"/>
-  <c:lang val="en-GB"/>
-  <c:roundedCorners val="0"/>
-  <mc:AlternateContent xmlns:mc="http://schemas.openxmlformats.org/markup-compatibility/2006">
-    <mc:Choice xmlns:c14="http://schemas.microsoft.com/office/drawing/2007/8/2/chart" Requires="c14">
-      <c14:style val="102"/>
-    </mc:Choice>
-    <mc:Fallback>
-      <c:style val="2"/>
-    </mc:Fallback>
-  </mc:AlternateContent>
-  <c:chart>
-    <c:title>
-      <c:tx>
-        <c:rich>
-          <a:bodyPr rot="0" spcFirstLastPara="1" vertOverflow="ellipsis" vert="horz" wrap="square" anchor="ctr" anchorCtr="1"/>
-          <a:lstStyle/>
-          <a:p>
-            <a:pPr>
-              <a:defRPr sz="1862" b="0" i="0" u="none" strike="noStrike" kern="1200" spc="0" baseline="0">
-                <a:solidFill>
-                  <a:schemeClr val="tx1">
-                    <a:lumMod val="65000"/>
-                    <a:lumOff val="35000"/>
-                  </a:schemeClr>
-                </a:solidFill>
-                <a:latin typeface="+mn-lt"/>
-                <a:ea typeface="+mn-ea"/>
-                <a:cs typeface="+mn-cs"/>
-              </a:defRPr>
-            </a:pPr>
-            <a:r>
-              <a:rPr lang="el-GR" dirty="0"/>
-              <a:t>Τίτλος Γραφήματος</a:t>
-            </a:r>
-          </a:p>
-        </c:rich>
-      </c:tx>
-      <c:overlay val="0"/>
-      <c:spPr>
-        <a:noFill/>
-        <a:ln>
-          <a:noFill/>
-        </a:ln>
-        <a:effectLst/>
-      </c:spPr>
-      <c:txPr>
-        <a:bodyPr rot="0" spcFirstLastPara="1" vertOverflow="ellipsis" vert="horz" wrap="square" anchor="ctr" anchorCtr="1"/>
-        <a:lstStyle/>
-        <a:p>
-          <a:pPr>
-            <a:defRPr sz="1862" b="0" i="0" u="none" strike="noStrike" kern="1200" spc="0" baseline="0">
-              <a:solidFill>
-                <a:schemeClr val="tx1">
-                  <a:lumMod val="65000"/>
-                  <a:lumOff val="35000"/>
-                </a:schemeClr>
-              </a:solidFill>
-              <a:latin typeface="+mn-lt"/>
-              <a:ea typeface="+mn-ea"/>
-              <a:cs typeface="+mn-cs"/>
-            </a:defRPr>
-          </a:pPr>
-          <a:endParaRPr lang="el-GR"/>
-        </a:p>
-      </c:txPr>
-    </c:title>
-    <c:autoTitleDeleted val="0"/>
-    <c:plotArea>
-      <c:layout/>
-      <c:barChart>
-        <c:barDir val="col"/>
-        <c:grouping val="clustered"/>
-        <c:varyColors val="0"/>
-        <c:ser>
-          <c:idx val="0"/>
-          <c:order val="0"/>
-          <c:tx>
-            <c:strRef>
-              <c:f>Sheet1!$B$1</c:f>
-              <c:strCache>
-                <c:ptCount val="1"/>
-                <c:pt idx="0">
-                  <c:v>Ψήφοι</c:v>
-                </c:pt>
-              </c:strCache>
-            </c:strRef>
-          </c:tx>
-          <c:spPr>
-            <a:solidFill>
-              <a:schemeClr val="accent1"/>
-            </a:solidFill>
-            <a:ln w="19050">
-              <a:solidFill>
-                <a:schemeClr val="lt1"/>
-              </a:solidFill>
-            </a:ln>
-            <a:effectLst/>
-          </c:spPr>
-          <c:invertIfNegative val="0"/>
-          <c:cat>
-            <c:strRef>
-              <c:f>Sheet1!$A$2:$A$6</c:f>
-              <c:strCache>
-                <c:ptCount val="5"/>
-                <c:pt idx="0">
-                  <c:v>Ανδρέας</c:v>
-                </c:pt>
-                <c:pt idx="1">
-                  <c:v>Ελένη</c:v>
-                </c:pt>
-                <c:pt idx="2">
-                  <c:v>Νικόλ</c:v>
-                </c:pt>
-                <c:pt idx="3">
-                  <c:v>Μάριος</c:v>
-                </c:pt>
-                <c:pt idx="4">
-                  <c:v>Κώστας</c:v>
-                </c:pt>
-              </c:strCache>
-            </c:strRef>
-          </c:cat>
-          <c:val>
-            <c:numRef>
-              <c:f>Sheet1!$B$2:$B$6</c:f>
-              <c:numCache>
-                <c:formatCode>General</c:formatCode>
-                <c:ptCount val="5"/>
-                <c:pt idx="0">
-                  <c:v>20</c:v>
-                </c:pt>
-                <c:pt idx="1">
-                  <c:v>16</c:v>
-                </c:pt>
-                <c:pt idx="2">
-                  <c:v>29</c:v>
-                </c:pt>
-                <c:pt idx="3">
-                  <c:v>17</c:v>
-                </c:pt>
-                <c:pt idx="4">
-                  <c:v>18</c:v>
-                </c:pt>
-              </c:numCache>
-            </c:numRef>
-          </c:val>
-          <c:extLst>
-            <c:ext xmlns:c16="http://schemas.microsoft.com/office/drawing/2014/chart" uri="{C3380CC4-5D6E-409C-BE32-E72D297353CC}">
-              <c16:uniqueId val="{00000000-E244-42AE-AF30-5CEF7C54C3C4}"/>
-            </c:ext>
-          </c:extLst>
-        </c:ser>
-        <c:dLbls>
-          <c:showLegendKey val="0"/>
-          <c:showVal val="0"/>
-          <c:showCatName val="0"/>
-          <c:showSerName val="0"/>
-          <c:showPercent val="0"/>
-          <c:showBubbleSize val="0"/>
-        </c:dLbls>
-        <c:gapWidth val="150"/>
-        <c:axId val="500741008"/>
-        <c:axId val="500741664"/>
-      </c:barChart>
-      <c:catAx>
-        <c:axId val="500741008"/>
-        <c:scaling>
-          <c:orientation val="minMax"/>
-        </c:scaling>
-        <c:delete val="0"/>
-        <c:axPos val="b"/>
-        <c:numFmt formatCode="General" sourceLinked="1"/>
-        <c:majorTickMark val="out"/>
-        <c:minorTickMark val="none"/>
-        <c:tickLblPos val="nextTo"/>
-        <c:spPr>
-          <a:noFill/>
-          <a:ln w="9525" cap="flat" cmpd="sng" algn="ctr">
-            <a:solidFill>
-              <a:schemeClr val="tx1">
-                <a:lumMod val="15000"/>
-                <a:lumOff val="85000"/>
-              </a:schemeClr>
-            </a:solidFill>
-            <a:round/>
-          </a:ln>
-          <a:effectLst/>
-        </c:spPr>
-        <c:txPr>
-          <a:bodyPr rot="-60000000" spcFirstLastPara="1" vertOverflow="ellipsis" vert="horz" wrap="square" anchor="ctr" anchorCtr="1"/>
-          <a:lstStyle/>
-          <a:p>
-            <a:pPr>
-              <a:defRPr sz="1197" b="0" i="0" u="none" strike="noStrike" kern="1200" baseline="0">
-                <a:solidFill>
-                  <a:schemeClr val="tx1">
-                    <a:lumMod val="65000"/>
-                    <a:lumOff val="35000"/>
-                  </a:schemeClr>
-                </a:solidFill>
-                <a:latin typeface="+mn-lt"/>
-                <a:ea typeface="+mn-ea"/>
-                <a:cs typeface="+mn-cs"/>
-              </a:defRPr>
-            </a:pPr>
-            <a:endParaRPr lang="el-GR"/>
-          </a:p>
-        </c:txPr>
-        <c:crossAx val="500741664"/>
-        <c:crosses val="autoZero"/>
-        <c:auto val="1"/>
-        <c:lblAlgn val="ctr"/>
-        <c:lblOffset val="100"/>
-        <c:noMultiLvlLbl val="0"/>
-      </c:catAx>
-      <c:valAx>
-        <c:axId val="500741664"/>
-        <c:scaling>
-          <c:orientation val="minMax"/>
-        </c:scaling>
-        <c:delete val="0"/>
-        <c:axPos val="l"/>
-        <c:majorGridlines>
-          <c:spPr>
-            <a:ln w="9525" cap="flat" cmpd="sng" algn="ctr">
-              <a:solidFill>
-                <a:schemeClr val="tx1">
-                  <a:lumMod val="15000"/>
-                  <a:lumOff val="85000"/>
-                </a:schemeClr>
-              </a:solidFill>
-              <a:round/>
-            </a:ln>
-            <a:effectLst/>
-          </c:spPr>
-        </c:majorGridlines>
-        <c:numFmt formatCode="General" sourceLinked="1"/>
-        <c:majorTickMark val="out"/>
-        <c:minorTickMark val="none"/>
-        <c:tickLblPos val="nextTo"/>
-        <c:spPr>
-          <a:noFill/>
-          <a:ln>
-            <a:noFill/>
-          </a:ln>
-          <a:effectLst/>
-        </c:spPr>
-        <c:txPr>
-          <a:bodyPr rot="-60000000" spcFirstLastPara="1" vertOverflow="ellipsis" vert="horz" wrap="square" anchor="ctr" anchorCtr="1"/>
-          <a:lstStyle/>
-          <a:p>
-            <a:pPr>
-              <a:defRPr sz="1197" b="0" i="0" u="none" strike="noStrike" kern="1200" baseline="0">
-                <a:solidFill>
-                  <a:schemeClr val="tx1">
-                    <a:lumMod val="65000"/>
-                    <a:lumOff val="35000"/>
-                  </a:schemeClr>
-                </a:solidFill>
-                <a:latin typeface="+mn-lt"/>
-                <a:ea typeface="+mn-ea"/>
-                <a:cs typeface="+mn-cs"/>
-              </a:defRPr>
-            </a:pPr>
-            <a:endParaRPr lang="el-GR"/>
-          </a:p>
-        </c:txPr>
-        <c:crossAx val="500741008"/>
-        <c:crosses val="autoZero"/>
-        <c:crossBetween val="between"/>
-      </c:valAx>
-      <c:spPr>
-        <a:noFill/>
-        <a:ln>
-          <a:noFill/>
-        </a:ln>
-        <a:effectLst/>
-      </c:spPr>
-    </c:plotArea>
-    <c:legend>
-      <c:legendPos val="b"/>
-      <c:overlay val="0"/>
-      <c:spPr>
-        <a:noFill/>
-        <a:ln>
-          <a:noFill/>
-        </a:ln>
-        <a:effectLst/>
-      </c:spPr>
-      <c:txPr>
-        <a:bodyPr rot="0" spcFirstLastPara="1" vertOverflow="ellipsis" vert="horz" wrap="square" anchor="ctr" anchorCtr="1"/>
-        <a:lstStyle/>
-        <a:p>
-          <a:pPr>
-            <a:defRPr sz="1197" b="0" i="0" u="none" strike="noStrike" kern="1200" baseline="0">
-              <a:solidFill>
-                <a:schemeClr val="tx1">
-                  <a:lumMod val="65000"/>
-                  <a:lumOff val="35000"/>
-                </a:schemeClr>
-              </a:solidFill>
-              <a:latin typeface="+mn-lt"/>
-              <a:ea typeface="+mn-ea"/>
-              <a:cs typeface="+mn-cs"/>
-            </a:defRPr>
-          </a:pPr>
-          <a:endParaRPr lang="el-GR"/>
-        </a:p>
-      </c:txPr>
-    </c:legend>
-    <c:plotVisOnly val="1"/>
-    <c:dispBlanksAs val="gap"/>
-    <c:showDLblsOverMax val="0"/>
-  </c:chart>
-  <c:spPr>
-    <a:noFill/>
-    <a:ln>
-      <a:noFill/>
-    </a:ln>
-    <a:effectLst/>
-  </c:spPr>
-  <c:txPr>
-    <a:bodyPr/>
-    <a:lstStyle/>
-    <a:p>
-      <a:pPr>
-        <a:defRPr/>
-      </a:pPr>
-      <a:endParaRPr lang="el-GR"/>
-    </a:p>
-  </c:txPr>
-  <c:externalData r:id="rId3">
-    <c:autoUpdate val="0"/>
-  </c:externalData>
-</c:chartSpace>
-</file>
-
-<file path=ppt/charts/chart2.xml><?xml version="1.0" encoding="utf-8"?>
 <c:chartSpace xmlns:c="http://schemas.openxmlformats.org/drawingml/2006/chart" xmlns:a="http://schemas.openxmlformats.org/drawingml/2006/main" xmlns:r="http://schemas.openxmlformats.org/officeDocument/2006/relationships" xmlns:c16r2="http://schemas.microsoft.com/office/drawing/2015/06/chart">
   <c:date1904 val="0"/>
   <c:lang val="en-GB"/>
@@ -995,566 +645,7 @@
 </cs:colorStyle>
 </file>
 
-<file path=ppt/charts/colors2.xml><?xml version="1.0" encoding="utf-8"?>
-<cs:colorStyle xmlns:cs="http://schemas.microsoft.com/office/drawing/2012/chartStyle" xmlns:a="http://schemas.openxmlformats.org/drawingml/2006/main" meth="cycle" id="10">
-  <a:schemeClr val="accent1"/>
-  <a:schemeClr val="accent2"/>
-  <a:schemeClr val="accent3"/>
-  <a:schemeClr val="accent4"/>
-  <a:schemeClr val="accent5"/>
-  <a:schemeClr val="accent6"/>
-  <cs:variation/>
-  <cs:variation>
-    <a:lumMod val="60000"/>
-  </cs:variation>
-  <cs:variation>
-    <a:lumMod val="80000"/>
-    <a:lumOff val="20000"/>
-  </cs:variation>
-  <cs:variation>
-    <a:lumMod val="80000"/>
-  </cs:variation>
-  <cs:variation>
-    <a:lumMod val="60000"/>
-    <a:lumOff val="40000"/>
-  </cs:variation>
-  <cs:variation>
-    <a:lumMod val="50000"/>
-  </cs:variation>
-  <cs:variation>
-    <a:lumMod val="70000"/>
-    <a:lumOff val="30000"/>
-  </cs:variation>
-  <cs:variation>
-    <a:lumMod val="70000"/>
-  </cs:variation>
-  <cs:variation>
-    <a:lumMod val="50000"/>
-    <a:lumOff val="50000"/>
-  </cs:variation>
-</cs:colorStyle>
-</file>
-
 <file path=ppt/charts/style1.xml><?xml version="1.0" encoding="utf-8"?>
-<cs:chartStyle xmlns:cs="http://schemas.microsoft.com/office/drawing/2012/chartStyle" xmlns:a="http://schemas.openxmlformats.org/drawingml/2006/main" id="251">
-  <cs:axisTitle>
-    <cs:lnRef idx="0"/>
-    <cs:fillRef idx="0"/>
-    <cs:effectRef idx="0"/>
-    <cs:fontRef idx="minor">
-      <a:schemeClr val="tx1">
-        <a:lumMod val="65000"/>
-        <a:lumOff val="35000"/>
-      </a:schemeClr>
-    </cs:fontRef>
-    <cs:defRPr sz="1330" kern="1200"/>
-  </cs:axisTitle>
-  <cs:categoryAxis>
-    <cs:lnRef idx="0"/>
-    <cs:fillRef idx="0"/>
-    <cs:effectRef idx="0"/>
-    <cs:fontRef idx="minor">
-      <a:schemeClr val="tx1">
-        <a:lumMod val="65000"/>
-        <a:lumOff val="35000"/>
-      </a:schemeClr>
-    </cs:fontRef>
-    <cs:spPr>
-      <a:ln w="9525" cap="flat" cmpd="sng" algn="ctr">
-        <a:solidFill>
-          <a:schemeClr val="tx1">
-            <a:lumMod val="15000"/>
-            <a:lumOff val="85000"/>
-          </a:schemeClr>
-        </a:solidFill>
-        <a:round/>
-      </a:ln>
-    </cs:spPr>
-    <cs:defRPr sz="1197" kern="1200"/>
-  </cs:categoryAxis>
-  <cs:chartArea mods="allowNoFillOverride allowNoLineOverride">
-    <cs:lnRef idx="0"/>
-    <cs:fillRef idx="0"/>
-    <cs:effectRef idx="0"/>
-    <cs:fontRef idx="minor">
-      <a:schemeClr val="tx1"/>
-    </cs:fontRef>
-    <cs:spPr>
-      <a:solidFill>
-        <a:schemeClr val="bg1"/>
-      </a:solidFill>
-      <a:ln w="9525" cap="flat" cmpd="sng" algn="ctr">
-        <a:solidFill>
-          <a:schemeClr val="tx1">
-            <a:lumMod val="15000"/>
-            <a:lumOff val="85000"/>
-          </a:schemeClr>
-        </a:solidFill>
-        <a:round/>
-      </a:ln>
-    </cs:spPr>
-    <cs:defRPr sz="1197" kern="1200"/>
-  </cs:chartArea>
-  <cs:dataLabel>
-    <cs:lnRef idx="0"/>
-    <cs:fillRef idx="0"/>
-    <cs:effectRef idx="0"/>
-    <cs:fontRef idx="minor">
-      <a:schemeClr val="tx1">
-        <a:lumMod val="75000"/>
-        <a:lumOff val="25000"/>
-      </a:schemeClr>
-    </cs:fontRef>
-    <cs:defRPr sz="1197" kern="1200"/>
-  </cs:dataLabel>
-  <cs:dataLabelCallout>
-    <cs:lnRef idx="0"/>
-    <cs:fillRef idx="0"/>
-    <cs:effectRef idx="0"/>
-    <cs:fontRef idx="minor">
-      <a:schemeClr val="dk1">
-        <a:lumMod val="65000"/>
-        <a:lumOff val="35000"/>
-      </a:schemeClr>
-    </cs:fontRef>
-    <cs:spPr>
-      <a:solidFill>
-        <a:schemeClr val="lt1"/>
-      </a:solidFill>
-      <a:ln>
-        <a:solidFill>
-          <a:schemeClr val="dk1">
-            <a:lumMod val="25000"/>
-            <a:lumOff val="75000"/>
-          </a:schemeClr>
-        </a:solidFill>
-      </a:ln>
-    </cs:spPr>
-    <cs:defRPr sz="1197" kern="1200"/>
-    <cs:bodyPr rot="0" spcFirstLastPara="1" vertOverflow="clip" horzOverflow="clip" vert="horz" wrap="square" lIns="36576" tIns="18288" rIns="36576" bIns="18288" anchor="ctr" anchorCtr="1">
-      <a:spAutoFit/>
-    </cs:bodyPr>
-  </cs:dataLabelCallout>
-  <cs:dataPoint>
-    <cs:lnRef idx="0"/>
-    <cs:fillRef idx="1">
-      <cs:styleClr val="auto"/>
-    </cs:fillRef>
-    <cs:effectRef idx="0"/>
-    <cs:fontRef idx="minor">
-      <a:schemeClr val="tx1"/>
-    </cs:fontRef>
-    <cs:spPr>
-      <a:ln w="19050">
-        <a:solidFill>
-          <a:schemeClr val="lt1"/>
-        </a:solidFill>
-      </a:ln>
-    </cs:spPr>
-  </cs:dataPoint>
-  <cs:dataPoint3D>
-    <cs:lnRef idx="0"/>
-    <cs:fillRef idx="1">
-      <cs:styleClr val="auto"/>
-    </cs:fillRef>
-    <cs:effectRef idx="0"/>
-    <cs:fontRef idx="minor">
-      <a:schemeClr val="tx1"/>
-    </cs:fontRef>
-    <cs:spPr>
-      <a:ln w="25400">
-        <a:solidFill>
-          <a:schemeClr val="lt1"/>
-        </a:solidFill>
-      </a:ln>
-    </cs:spPr>
-  </cs:dataPoint3D>
-  <cs:dataPointLine>
-    <cs:lnRef idx="0">
-      <cs:styleClr val="auto"/>
-    </cs:lnRef>
-    <cs:fillRef idx="0"/>
-    <cs:effectRef idx="0"/>
-    <cs:fontRef idx="minor">
-      <a:schemeClr val="tx1"/>
-    </cs:fontRef>
-    <cs:spPr>
-      <a:ln w="28575" cap="rnd">
-        <a:solidFill>
-          <a:schemeClr val="phClr"/>
-        </a:solidFill>
-        <a:round/>
-      </a:ln>
-    </cs:spPr>
-  </cs:dataPointLine>
-  <cs:dataPointMarker>
-    <cs:lnRef idx="0">
-      <cs:styleClr val="auto"/>
-    </cs:lnRef>
-    <cs:fillRef idx="1">
-      <cs:styleClr val="auto"/>
-    </cs:fillRef>
-    <cs:effectRef idx="0"/>
-    <cs:fontRef idx="minor">
-      <a:schemeClr val="tx1"/>
-    </cs:fontRef>
-    <cs:spPr>
-      <a:ln w="9525">
-        <a:solidFill>
-          <a:schemeClr val="phClr"/>
-        </a:solidFill>
-      </a:ln>
-    </cs:spPr>
-  </cs:dataPointMarker>
-  <cs:dataPointMarkerLayout symbol="circle" size="5"/>
-  <cs:dataPointWireframe>
-    <cs:lnRef idx="0">
-      <cs:styleClr val="auto"/>
-    </cs:lnRef>
-    <cs:fillRef idx="0"/>
-    <cs:effectRef idx="0"/>
-    <cs:fontRef idx="minor">
-      <a:schemeClr val="tx1"/>
-    </cs:fontRef>
-    <cs:spPr>
-      <a:ln w="9525" cap="rnd">
-        <a:solidFill>
-          <a:schemeClr val="phClr"/>
-        </a:solidFill>
-        <a:round/>
-      </a:ln>
-    </cs:spPr>
-  </cs:dataPointWireframe>
-  <cs:dataTable>
-    <cs:lnRef idx="0"/>
-    <cs:fillRef idx="0"/>
-    <cs:effectRef idx="0"/>
-    <cs:fontRef idx="minor">
-      <a:schemeClr val="tx1">
-        <a:lumMod val="65000"/>
-        <a:lumOff val="35000"/>
-      </a:schemeClr>
-    </cs:fontRef>
-    <cs:spPr>
-      <a:noFill/>
-      <a:ln w="9525" cap="flat" cmpd="sng" algn="ctr">
-        <a:solidFill>
-          <a:schemeClr val="tx1">
-            <a:lumMod val="15000"/>
-            <a:lumOff val="85000"/>
-          </a:schemeClr>
-        </a:solidFill>
-        <a:round/>
-      </a:ln>
-    </cs:spPr>
-    <cs:defRPr sz="1197" kern="1200"/>
-  </cs:dataTable>
-  <cs:downBar>
-    <cs:lnRef idx="0"/>
-    <cs:fillRef idx="0"/>
-    <cs:effectRef idx="0"/>
-    <cs:fontRef idx="minor">
-      <a:schemeClr val="tx1"/>
-    </cs:fontRef>
-    <cs:spPr>
-      <a:solidFill>
-        <a:schemeClr val="dk1">
-          <a:lumMod val="75000"/>
-          <a:lumOff val="25000"/>
-        </a:schemeClr>
-      </a:solidFill>
-      <a:ln w="9525" cap="flat" cmpd="sng" algn="ctr">
-        <a:solidFill>
-          <a:schemeClr val="tx1">
-            <a:lumMod val="65000"/>
-            <a:lumOff val="35000"/>
-          </a:schemeClr>
-        </a:solidFill>
-        <a:round/>
-      </a:ln>
-    </cs:spPr>
-  </cs:downBar>
-  <cs:dropLine>
-    <cs:lnRef idx="0"/>
-    <cs:fillRef idx="0"/>
-    <cs:effectRef idx="0"/>
-    <cs:fontRef idx="minor">
-      <a:schemeClr val="tx1"/>
-    </cs:fontRef>
-    <cs:spPr>
-      <a:ln w="9525" cap="flat" cmpd="sng" algn="ctr">
-        <a:solidFill>
-          <a:schemeClr val="tx1">
-            <a:lumMod val="35000"/>
-            <a:lumOff val="65000"/>
-          </a:schemeClr>
-        </a:solidFill>
-        <a:round/>
-      </a:ln>
-    </cs:spPr>
-  </cs:dropLine>
-  <cs:errorBar>
-    <cs:lnRef idx="0"/>
-    <cs:fillRef idx="0"/>
-    <cs:effectRef idx="0"/>
-    <cs:fontRef idx="minor">
-      <a:schemeClr val="tx1"/>
-    </cs:fontRef>
-    <cs:spPr>
-      <a:ln w="9525" cap="flat" cmpd="sng" algn="ctr">
-        <a:solidFill>
-          <a:schemeClr val="tx1">
-            <a:lumMod val="65000"/>
-            <a:lumOff val="35000"/>
-          </a:schemeClr>
-        </a:solidFill>
-        <a:round/>
-      </a:ln>
-    </cs:spPr>
-  </cs:errorBar>
-  <cs:floor>
-    <cs:lnRef idx="0"/>
-    <cs:fillRef idx="0"/>
-    <cs:effectRef idx="0"/>
-    <cs:fontRef idx="minor">
-      <a:schemeClr val="tx1"/>
-    </cs:fontRef>
-    <cs:spPr>
-      <a:noFill/>
-      <a:ln>
-        <a:noFill/>
-      </a:ln>
-    </cs:spPr>
-  </cs:floor>
-  <cs:gridlineMajor>
-    <cs:lnRef idx="0"/>
-    <cs:fillRef idx="0"/>
-    <cs:effectRef idx="0"/>
-    <cs:fontRef idx="minor">
-      <a:schemeClr val="tx1"/>
-    </cs:fontRef>
-    <cs:spPr>
-      <a:ln w="9525" cap="flat" cmpd="sng" algn="ctr">
-        <a:solidFill>
-          <a:schemeClr val="tx1">
-            <a:lumMod val="15000"/>
-            <a:lumOff val="85000"/>
-          </a:schemeClr>
-        </a:solidFill>
-        <a:round/>
-      </a:ln>
-    </cs:spPr>
-  </cs:gridlineMajor>
-  <cs:gridlineMinor>
-    <cs:lnRef idx="0"/>
-    <cs:fillRef idx="0"/>
-    <cs:effectRef idx="0"/>
-    <cs:fontRef idx="minor">
-      <a:schemeClr val="tx1"/>
-    </cs:fontRef>
-    <cs:spPr>
-      <a:ln w="9525" cap="flat" cmpd="sng" algn="ctr">
-        <a:solidFill>
-          <a:schemeClr val="tx1">
-            <a:lumMod val="5000"/>
-            <a:lumOff val="95000"/>
-          </a:schemeClr>
-        </a:solidFill>
-        <a:round/>
-      </a:ln>
-    </cs:spPr>
-  </cs:gridlineMinor>
-  <cs:hiLoLine>
-    <cs:lnRef idx="0"/>
-    <cs:fillRef idx="0"/>
-    <cs:effectRef idx="0"/>
-    <cs:fontRef idx="minor">
-      <a:schemeClr val="tx1"/>
-    </cs:fontRef>
-    <cs:spPr>
-      <a:ln w="9525" cap="flat" cmpd="sng" algn="ctr">
-        <a:solidFill>
-          <a:schemeClr val="tx1">
-            <a:lumMod val="50000"/>
-            <a:lumOff val="50000"/>
-          </a:schemeClr>
-        </a:solidFill>
-        <a:round/>
-      </a:ln>
-    </cs:spPr>
-  </cs:hiLoLine>
-  <cs:leaderLine>
-    <cs:lnRef idx="0"/>
-    <cs:fillRef idx="0"/>
-    <cs:effectRef idx="0"/>
-    <cs:fontRef idx="minor">
-      <a:schemeClr val="tx1"/>
-    </cs:fontRef>
-    <cs:spPr>
-      <a:ln w="9525" cap="flat" cmpd="sng" algn="ctr">
-        <a:solidFill>
-          <a:schemeClr val="tx1">
-            <a:lumMod val="35000"/>
-            <a:lumOff val="65000"/>
-          </a:schemeClr>
-        </a:solidFill>
-        <a:round/>
-      </a:ln>
-    </cs:spPr>
-  </cs:leaderLine>
-  <cs:legend>
-    <cs:lnRef idx="0"/>
-    <cs:fillRef idx="0"/>
-    <cs:effectRef idx="0"/>
-    <cs:fontRef idx="minor">
-      <a:schemeClr val="tx1">
-        <a:lumMod val="65000"/>
-        <a:lumOff val="35000"/>
-      </a:schemeClr>
-    </cs:fontRef>
-    <cs:defRPr sz="1197" kern="1200"/>
-  </cs:legend>
-  <cs:plotArea mods="allowNoFillOverride allowNoLineOverride">
-    <cs:lnRef idx="0"/>
-    <cs:fillRef idx="0"/>
-    <cs:effectRef idx="0"/>
-    <cs:fontRef idx="minor">
-      <a:schemeClr val="tx1"/>
-    </cs:fontRef>
-  </cs:plotArea>
-  <cs:plotArea3D mods="allowNoFillOverride allowNoLineOverride">
-    <cs:lnRef idx="0"/>
-    <cs:fillRef idx="0"/>
-    <cs:effectRef idx="0"/>
-    <cs:fontRef idx="minor">
-      <a:schemeClr val="tx1"/>
-    </cs:fontRef>
-  </cs:plotArea3D>
-  <cs:seriesAxis>
-    <cs:lnRef idx="0"/>
-    <cs:fillRef idx="0"/>
-    <cs:effectRef idx="0"/>
-    <cs:fontRef idx="minor">
-      <a:schemeClr val="tx1">
-        <a:lumMod val="65000"/>
-        <a:lumOff val="35000"/>
-      </a:schemeClr>
-    </cs:fontRef>
-    <cs:defRPr sz="1197" kern="1200"/>
-  </cs:seriesAxis>
-  <cs:seriesLine>
-    <cs:lnRef idx="0"/>
-    <cs:fillRef idx="0"/>
-    <cs:effectRef idx="0"/>
-    <cs:fontRef idx="minor">
-      <a:schemeClr val="tx1"/>
-    </cs:fontRef>
-    <cs:spPr>
-      <a:ln w="9525" cap="flat" cmpd="sng" algn="ctr">
-        <a:solidFill>
-          <a:schemeClr val="tx1">
-            <a:lumMod val="35000"/>
-            <a:lumOff val="65000"/>
-          </a:schemeClr>
-        </a:solidFill>
-        <a:round/>
-      </a:ln>
-    </cs:spPr>
-  </cs:seriesLine>
-  <cs:title>
-    <cs:lnRef idx="0"/>
-    <cs:fillRef idx="0"/>
-    <cs:effectRef idx="0"/>
-    <cs:fontRef idx="minor">
-      <a:schemeClr val="tx1">
-        <a:lumMod val="65000"/>
-        <a:lumOff val="35000"/>
-      </a:schemeClr>
-    </cs:fontRef>
-    <cs:defRPr sz="1862" b="0" kern="1200" spc="0" baseline="0"/>
-  </cs:title>
-  <cs:trendline>
-    <cs:lnRef idx="0">
-      <cs:styleClr val="auto"/>
-    </cs:lnRef>
-    <cs:fillRef idx="0"/>
-    <cs:effectRef idx="0"/>
-    <cs:fontRef idx="minor">
-      <a:schemeClr val="tx1"/>
-    </cs:fontRef>
-    <cs:spPr>
-      <a:ln w="19050" cap="rnd">
-        <a:solidFill>
-          <a:schemeClr val="phClr"/>
-        </a:solidFill>
-        <a:prstDash val="sysDot"/>
-      </a:ln>
-    </cs:spPr>
-  </cs:trendline>
-  <cs:trendlineLabel>
-    <cs:lnRef idx="0"/>
-    <cs:fillRef idx="0"/>
-    <cs:effectRef idx="0"/>
-    <cs:fontRef idx="minor">
-      <a:schemeClr val="tx1">
-        <a:lumMod val="65000"/>
-        <a:lumOff val="35000"/>
-      </a:schemeClr>
-    </cs:fontRef>
-    <cs:defRPr sz="1197" kern="1200"/>
-  </cs:trendlineLabel>
-  <cs:upBar>
-    <cs:lnRef idx="0"/>
-    <cs:fillRef idx="0"/>
-    <cs:effectRef idx="0"/>
-    <cs:fontRef idx="minor">
-      <a:schemeClr val="tx1"/>
-    </cs:fontRef>
-    <cs:spPr>
-      <a:solidFill>
-        <a:schemeClr val="lt1"/>
-      </a:solidFill>
-      <a:ln w="9525" cap="flat" cmpd="sng" algn="ctr">
-        <a:solidFill>
-          <a:schemeClr val="tx1">
-            <a:lumMod val="65000"/>
-            <a:lumOff val="35000"/>
-          </a:schemeClr>
-        </a:solidFill>
-        <a:round/>
-      </a:ln>
-    </cs:spPr>
-  </cs:upBar>
-  <cs:valueAxis>
-    <cs:lnRef idx="0"/>
-    <cs:fillRef idx="0"/>
-    <cs:effectRef idx="0"/>
-    <cs:fontRef idx="minor">
-      <a:schemeClr val="tx1">
-        <a:lumMod val="65000"/>
-        <a:lumOff val="35000"/>
-      </a:schemeClr>
-    </cs:fontRef>
-    <cs:defRPr sz="1197" kern="1200"/>
-  </cs:valueAxis>
-  <cs:wall>
-    <cs:lnRef idx="0"/>
-    <cs:fillRef idx="0"/>
-    <cs:effectRef idx="0"/>
-    <cs:fontRef idx="minor">
-      <a:schemeClr val="tx1"/>
-    </cs:fontRef>
-    <cs:spPr>
-      <a:noFill/>
-      <a:ln>
-        <a:noFill/>
-      </a:ln>
-    </cs:spPr>
-  </cs:wall>
-</cs:chartStyle>
-</file>
-
-<file path=ppt/charts/style2.xml><?xml version="1.0" encoding="utf-8"?>
 <cs:chartStyle xmlns:cs="http://schemas.microsoft.com/office/drawing/2012/chartStyle" xmlns:a="http://schemas.openxmlformats.org/drawingml/2006/main" id="201">
   <cs:axisTitle>
     <cs:lnRef idx="0"/>
@@ -2188,7 +1279,7 @@
           <a:p>
             <a:fld id="{9B4B38B6-020F-4D2A-9354-7AB7F1AC6DEE}" type="datetimeFigureOut">
               <a:rPr lang="el-GR" smtClean="0"/>
-              <a:t>28/9/2026</a:t>
+              <a:t>1/10/2026</a:t>
             </a:fld>
             <a:endParaRPr lang="el-GR"/>
           </a:p>
@@ -2358,7 +1449,7 @@
           <a:p>
             <a:fld id="{9B4B38B6-020F-4D2A-9354-7AB7F1AC6DEE}" type="datetimeFigureOut">
               <a:rPr lang="el-GR" smtClean="0"/>
-              <a:t>28/9/2026</a:t>
+              <a:t>1/10/2026</a:t>
             </a:fld>
             <a:endParaRPr lang="el-GR"/>
           </a:p>
@@ -2538,7 +1629,7 @@
           <a:p>
             <a:fld id="{9B4B38B6-020F-4D2A-9354-7AB7F1AC6DEE}" type="datetimeFigureOut">
               <a:rPr lang="el-GR" smtClean="0"/>
-              <a:t>28/9/2026</a:t>
+              <a:t>1/10/2026</a:t>
             </a:fld>
             <a:endParaRPr lang="el-GR"/>
           </a:p>
@@ -2708,7 +1799,7 @@
           <a:p>
             <a:fld id="{9B4B38B6-020F-4D2A-9354-7AB7F1AC6DEE}" type="datetimeFigureOut">
               <a:rPr lang="el-GR" smtClean="0"/>
-              <a:t>28/9/2026</a:t>
+              <a:t>1/10/2026</a:t>
             </a:fld>
             <a:endParaRPr lang="el-GR"/>
           </a:p>
@@ -2954,7 +2045,7 @@
           <a:p>
             <a:fld id="{9B4B38B6-020F-4D2A-9354-7AB7F1AC6DEE}" type="datetimeFigureOut">
               <a:rPr lang="el-GR" smtClean="0"/>
-              <a:t>28/9/2026</a:t>
+              <a:t>1/10/2026</a:t>
             </a:fld>
             <a:endParaRPr lang="el-GR"/>
           </a:p>
@@ -3186,7 +2277,7 @@
           <a:p>
             <a:fld id="{9B4B38B6-020F-4D2A-9354-7AB7F1AC6DEE}" type="datetimeFigureOut">
               <a:rPr lang="el-GR" smtClean="0"/>
-              <a:t>28/9/2026</a:t>
+              <a:t>1/10/2026</a:t>
             </a:fld>
             <a:endParaRPr lang="el-GR"/>
           </a:p>
@@ -3553,7 +2644,7 @@
           <a:p>
             <a:fld id="{9B4B38B6-020F-4D2A-9354-7AB7F1AC6DEE}" type="datetimeFigureOut">
               <a:rPr lang="el-GR" smtClean="0"/>
-              <a:t>28/9/2026</a:t>
+              <a:t>1/10/2026</a:t>
             </a:fld>
             <a:endParaRPr lang="el-GR"/>
           </a:p>
@@ -3671,7 +2762,7 @@
           <a:p>
             <a:fld id="{9B4B38B6-020F-4D2A-9354-7AB7F1AC6DEE}" type="datetimeFigureOut">
               <a:rPr lang="el-GR" smtClean="0"/>
-              <a:t>28/9/2026</a:t>
+              <a:t>1/10/2026</a:t>
             </a:fld>
             <a:endParaRPr lang="el-GR"/>
           </a:p>
@@ -3766,7 +2857,7 @@
           <a:p>
             <a:fld id="{9B4B38B6-020F-4D2A-9354-7AB7F1AC6DEE}" type="datetimeFigureOut">
               <a:rPr lang="el-GR" smtClean="0"/>
-              <a:t>28/9/2026</a:t>
+              <a:t>1/10/2026</a:t>
             </a:fld>
             <a:endParaRPr lang="el-GR"/>
           </a:p>
@@ -4043,7 +3134,7 @@
           <a:p>
             <a:fld id="{9B4B38B6-020F-4D2A-9354-7AB7F1AC6DEE}" type="datetimeFigureOut">
               <a:rPr lang="el-GR" smtClean="0"/>
-              <a:t>28/9/2026</a:t>
+              <a:t>1/10/2026</a:t>
             </a:fld>
             <a:endParaRPr lang="el-GR"/>
           </a:p>
@@ -4296,7 +3387,7 @@
           <a:p>
             <a:fld id="{9B4B38B6-020F-4D2A-9354-7AB7F1AC6DEE}" type="datetimeFigureOut">
               <a:rPr lang="el-GR" smtClean="0"/>
-              <a:t>28/9/2026</a:t>
+              <a:t>1/10/2026</a:t>
             </a:fld>
             <a:endParaRPr lang="el-GR"/>
           </a:p>
@@ -4509,7 +3600,7 @@
           <a:p>
             <a:fld id="{9B4B38B6-020F-4D2A-9354-7AB7F1AC6DEE}" type="datetimeFigureOut">
               <a:rPr lang="el-GR" smtClean="0"/>
-              <a:t>28/9/2026</a:t>
+              <a:t>1/10/2026</a:t>
             </a:fld>
             <a:endParaRPr lang="el-GR"/>
           </a:p>
@@ -4914,58 +4005,6 @@
           <a:chExt cx="0" cy="0"/>
         </a:xfrm>
       </p:grpSpPr>
-      <p:graphicFrame>
-        <p:nvGraphicFramePr>
-          <p:cNvPr id="8" name="Chart 7"/>
-          <p:cNvGraphicFramePr/>
-          <p:nvPr>
-            <p:extLst>
-              <p:ext uri="{D42A27DB-BD31-4B8C-83A1-F6EECF244321}">
-                <p14:modId xmlns:p14="http://schemas.microsoft.com/office/powerpoint/2010/main" val="2261479402"/>
-              </p:ext>
-            </p:extLst>
-          </p:nvPr>
-        </p:nvGraphicFramePr>
-        <p:xfrm>
-          <a:off x="4064000" y="1439333"/>
-          <a:ext cx="8128000" cy="5418667"/>
-        </p:xfrm>
-        <a:graphic>
-          <a:graphicData uri="http://schemas.openxmlformats.org/drawingml/2006/chart">
-            <c:chart xmlns:c="http://schemas.openxmlformats.org/drawingml/2006/chart" xmlns:r="http://schemas.openxmlformats.org/officeDocument/2006/relationships" r:id="rId2"/>
-          </a:graphicData>
-        </a:graphic>
-      </p:graphicFrame>
-    </p:spTree>
-    <p:extLst>
-      <p:ext uri="{BB962C8B-B14F-4D97-AF65-F5344CB8AC3E}">
-        <p14:creationId xmlns:p14="http://schemas.microsoft.com/office/powerpoint/2010/main" val="3399422133"/>
-      </p:ext>
-    </p:extLst>
-  </p:cSld>
-  <p:clrMapOvr>
-    <a:masterClrMapping/>
-  </p:clrMapOvr>
-</p:sld>
-</file>
-
-<file path=ppt/slides/slide2.xml><?xml version="1.0" encoding="utf-8"?>
-<p:sld xmlns:a="http://schemas.openxmlformats.org/drawingml/2006/main" xmlns:r="http://schemas.openxmlformats.org/officeDocument/2006/relationships" xmlns:p="http://schemas.openxmlformats.org/presentationml/2006/main">
-  <p:cSld>
-    <p:spTree>
-      <p:nvGrpSpPr>
-        <p:cNvPr id="1" name=""/>
-        <p:cNvGrpSpPr/>
-        <p:nvPr/>
-      </p:nvGrpSpPr>
-      <p:grpSpPr>
-        <a:xfrm>
-          <a:off x="0" y="0"/>
-          <a:ext cx="0" cy="0"/>
-          <a:chOff x="0" y="0"/>
-          <a:chExt cx="0" cy="0"/>
-        </a:xfrm>
-      </p:grpSpPr>
       <p:sp>
         <p:nvSpPr>
           <p:cNvPr id="2" name="Title 1">
